--- a/配布/研修スライド.pptx
+++ b/配布/研修スライド.pptx
@@ -5,7 +5,7 @@
     <p:sldMasterId id="2147483648" r:id="rId1"/>
   </p:sldMasterIdLst>
   <p:notesMasterIdLst>
-    <p:notesMasterId r:id="rId29"/>
+    <p:notesMasterId r:id="rId32"/>
   </p:notesMasterIdLst>
   <p:sldIdLst>
     <p:sldId id="256" r:id="rId2"/>
@@ -14,30 +14,30 @@
     <p:sldId id="259" r:id="rId5"/>
     <p:sldId id="260" r:id="rId6"/>
     <p:sldId id="261" r:id="rId7"/>
-    <p:sldId id="265" r:id="rId11"/>
-    <p:sldId id="284" r:id="rId35"/>
-    <p:sldId id="262" r:id="rId8"/>
-    <p:sldId id="263" r:id="rId9"/>
-    <p:sldId id="264" r:id="rId10"/>
-    <p:sldId id="266" r:id="rId12"/>
+    <p:sldId id="265" r:id="rId8"/>
+    <p:sldId id="284" r:id="rId9"/>
+    <p:sldId id="262" r:id="rId10"/>
+    <p:sldId id="263" r:id="rId11"/>
+    <p:sldId id="264" r:id="rId12"/>
+    <p:sldId id="266" r:id="rId13"/>
     <p:sldId id="268" r:id="rId14"/>
-    <p:sldId id="267" r:id="rId13"/>
-    <p:sldId id="269" r:id="rId15"/>
-    <p:sldId id="270" r:id="rId16"/>
-    <p:sldId id="283" r:id="rId34"/>
-    <p:sldId id="271" r:id="rId17"/>
-    <p:sldId id="272" r:id="rId18"/>
-    <p:sldId id="273" r:id="rId19"/>
-    <p:sldId id="285" r:id="rId36"/>
-    <p:sldId id="274" r:id="rId20"/>
-    <p:sldId id="275" r:id="rId21"/>
-    <p:sldId id="276" r:id="rId22"/>
-    <p:sldId id="277" r:id="rId23"/>
-    <p:sldId id="278" r:id="rId24"/>
-    <p:sldId id="279" r:id="rId25"/>
-    <p:sldId id="280" r:id="rId26"/>
-    <p:sldId id="282" r:id="rId27"/>
-    <p:sldId id="281" r:id="rId28"/>
+    <p:sldId id="267" r:id="rId15"/>
+    <p:sldId id="269" r:id="rId16"/>
+    <p:sldId id="270" r:id="rId17"/>
+    <p:sldId id="283" r:id="rId18"/>
+    <p:sldId id="271" r:id="rId19"/>
+    <p:sldId id="272" r:id="rId20"/>
+    <p:sldId id="273" r:id="rId21"/>
+    <p:sldId id="285" r:id="rId22"/>
+    <p:sldId id="274" r:id="rId23"/>
+    <p:sldId id="275" r:id="rId24"/>
+    <p:sldId id="276" r:id="rId25"/>
+    <p:sldId id="277" r:id="rId26"/>
+    <p:sldId id="278" r:id="rId27"/>
+    <p:sldId id="279" r:id="rId28"/>
+    <p:sldId id="280" r:id="rId29"/>
+    <p:sldId id="282" r:id="rId30"/>
+    <p:sldId id="281" r:id="rId31"/>
   </p:sldIdLst>
   <p:sldSz cx="12192000" cy="6858000"/>
   <p:notesSz cx="6858000" cy="12192000"/>
@@ -415,7 +415,7 @@
           <a:p>
             <a:fld id="{F7021451-1387-4CA6-816F-3879F97B5CBC}" type="slidenum">
               <a:rPr lang="en-US"/>
-              <a:t>10</a:t>
+              <a:t>11</a:t>
             </a:fld>
             <a:endParaRPr lang="en-US"/>
           </a:p>
@@ -499,7 +499,7 @@
           <a:p>
             <a:fld id="{F7021451-1387-4CA6-816F-3879F97B5CBC}" type="slidenum">
               <a:rPr lang="en-US"/>
-              <a:t>11</a:t>
+              <a:t>12</a:t>
             </a:fld>
             <a:endParaRPr lang="en-US"/>
           </a:p>
@@ -583,7 +583,7 @@
           <a:p>
             <a:fld id="{F7021451-1387-4CA6-816F-3879F97B5CBC}" type="slidenum">
               <a:rPr lang="en-US"/>
-              <a:t>12</a:t>
+              <a:t>13</a:t>
             </a:fld>
             <a:endParaRPr lang="en-US"/>
           </a:p>
@@ -667,7 +667,7 @@
           <a:p>
             <a:fld id="{F7021451-1387-4CA6-816F-3879F97B5CBC}" type="slidenum">
               <a:rPr lang="en-US"/>
-              <a:t>13</a:t>
+              <a:t>14</a:t>
             </a:fld>
             <a:endParaRPr lang="en-US"/>
           </a:p>
@@ -751,7 +751,7 @@
           <a:p>
             <a:fld id="{F7021451-1387-4CA6-816F-3879F97B5CBC}" type="slidenum">
               <a:rPr lang="en-US"/>
-              <a:t>14</a:t>
+              <a:t>15</a:t>
             </a:fld>
             <a:endParaRPr lang="en-US"/>
           </a:p>
@@ -835,7 +835,7 @@
           <a:p>
             <a:fld id="{F7021451-1387-4CA6-816F-3879F97B5CBC}" type="slidenum">
               <a:rPr lang="en-US"/>
-              <a:t>15</a:t>
+              <a:t>16</a:t>
             </a:fld>
             <a:endParaRPr lang="en-US"/>
           </a:p>
@@ -919,7 +919,7 @@
           <a:p>
             <a:fld id="{F7021451-1387-4CA6-816F-3879F97B5CBC}" type="slidenum">
               <a:rPr lang="en-US"/>
-              <a:t>16</a:t>
+              <a:t>18</a:t>
             </a:fld>
             <a:endParaRPr lang="en-US"/>
           </a:p>
@@ -1003,7 +1003,7 @@
           <a:p>
             <a:fld id="{F7021451-1387-4CA6-816F-3879F97B5CBC}" type="slidenum">
               <a:rPr lang="en-US"/>
-              <a:t>17</a:t>
+              <a:t>19</a:t>
             </a:fld>
             <a:endParaRPr lang="en-US"/>
           </a:p>
@@ -1087,7 +1087,7 @@
           <a:p>
             <a:fld id="{F7021451-1387-4CA6-816F-3879F97B5CBC}" type="slidenum">
               <a:rPr lang="en-US"/>
-              <a:t>18</a:t>
+              <a:t>20</a:t>
             </a:fld>
             <a:endParaRPr lang="en-US"/>
           </a:p>
@@ -1171,7 +1171,7 @@
           <a:p>
             <a:fld id="{F7021451-1387-4CA6-816F-3879F97B5CBC}" type="slidenum">
               <a:rPr lang="en-US"/>
-              <a:t>19</a:t>
+              <a:t>22</a:t>
             </a:fld>
             <a:endParaRPr lang="en-US"/>
           </a:p>
@@ -1339,7 +1339,7 @@
           <a:p>
             <a:fld id="{F7021451-1387-4CA6-816F-3879F97B5CBC}" type="slidenum">
               <a:rPr lang="en-US"/>
-              <a:t>20</a:t>
+              <a:t>23</a:t>
             </a:fld>
             <a:endParaRPr lang="en-US"/>
           </a:p>
@@ -1423,7 +1423,7 @@
           <a:p>
             <a:fld id="{F7021451-1387-4CA6-816F-3879F97B5CBC}" type="slidenum">
               <a:rPr lang="en-US"/>
-              <a:t>21</a:t>
+              <a:t>24</a:t>
             </a:fld>
             <a:endParaRPr lang="en-US"/>
           </a:p>
@@ -1507,7 +1507,7 @@
           <a:p>
             <a:fld id="{F7021451-1387-4CA6-816F-3879F97B5CBC}" type="slidenum">
               <a:rPr lang="en-US"/>
-              <a:t>22</a:t>
+              <a:t>25</a:t>
             </a:fld>
             <a:endParaRPr lang="en-US"/>
           </a:p>
@@ -1591,7 +1591,7 @@
           <a:p>
             <a:fld id="{F7021451-1387-4CA6-816F-3879F97B5CBC}" type="slidenum">
               <a:rPr lang="en-US"/>
-              <a:t>23</a:t>
+              <a:t>26</a:t>
             </a:fld>
             <a:endParaRPr lang="en-US"/>
           </a:p>
@@ -1675,7 +1675,7 @@
           <a:p>
             <a:fld id="{F7021451-1387-4CA6-816F-3879F97B5CBC}" type="slidenum">
               <a:rPr lang="en-US"/>
-              <a:t>24</a:t>
+              <a:t>27</a:t>
             </a:fld>
             <a:endParaRPr lang="en-US"/>
           </a:p>
@@ -1759,7 +1759,7 @@
           <a:p>
             <a:fld id="{F7021451-1387-4CA6-816F-3879F97B5CBC}" type="slidenum">
               <a:rPr lang="en-US"/>
-              <a:t>25</a:t>
+              <a:t>28</a:t>
             </a:fld>
             <a:endParaRPr lang="en-US"/>
           </a:p>
@@ -1843,7 +1843,7 @@
           <a:p>
             <a:fld id="{F7021451-1387-4CA6-816F-3879F97B5CBC}" type="slidenum">
               <a:rPr lang="en-US"/>
-              <a:t>27</a:t>
+              <a:t>30</a:t>
             </a:fld>
             <a:endParaRPr lang="en-US"/>
           </a:p>
@@ -2347,7 +2347,7 @@
           <a:p>
             <a:fld id="{F7021451-1387-4CA6-816F-3879F97B5CBC}" type="slidenum">
               <a:rPr lang="en-US"/>
-              <a:t>8</a:t>
+              <a:t>9</a:t>
             </a:fld>
             <a:endParaRPr lang="en-US"/>
           </a:p>
@@ -2431,7 +2431,7 @@
           <a:p>
             <a:fld id="{F7021451-1387-4CA6-816F-3879F97B5CBC}" type="slidenum">
               <a:rPr lang="en-US"/>
-              <a:t>9</a:t>
+              <a:t>10</a:t>
             </a:fld>
             <a:endParaRPr lang="en-US"/>
           </a:p>
@@ -5635,7 +5635,7 @@
                 <a:ea typeface="Consolas" pitchFamily="34" charset="-122"/>
                 <a:cs typeface="Consolas" pitchFamily="34" charset="-120"/>
               </a:rPr>
-              <a:t>data/トヨタ自動車_E02144 の有価証券報告書XBRLから主要財務（連結・通期）を抽出して data.json にまとめ、その data.json から外部ライブラリなしの単一HTMLダッシュボード（dashboard.html）を作って。抽出・生成はスクリプトで行い、結果を見ながら仕上げて。</a:t>
+              <a:t>data/AREホールディングス_E21187 の有価証券報告書XBRLから主要財務（連結・通期）を抽出して data.json にまとめ、その data.json から外部ライブラリなしの単一HTMLダッシュボード（dashboard.html）を作って。抽出・生成はスクリプトで行い、結果を見ながら仕上げて。</a:t>
             </a:r>
             <a:endParaRPr lang="en-US" sz="1600" dirty="0"/>
           </a:p>
@@ -5920,7 +5920,7 @@
 </file>
 
 <file path=ppt/slides/slide17.xml><?xml version="1.0" encoding="utf-8"?>
-<p:sld xmlns:a="http://schemas.openxmlformats.org/drawingml/2006/main" xmlns:p="http://schemas.openxmlformats.org/presentationml/2006/main" xmlns:r="http://schemas.openxmlformats.org/officeDocument/2006/relationships">
+<p:sld xmlns:a="http://schemas.openxmlformats.org/drawingml/2006/main" xmlns:r="http://schemas.openxmlformats.org/officeDocument/2006/relationships" xmlns:p="http://schemas.openxmlformats.org/presentationml/2006/main">
   <p:cSld>
     <p:bg>
       <p:bgPr>
@@ -5936,7 +5936,14 @@
         <p:cNvGrpSpPr/>
         <p:nvPr/>
       </p:nvGrpSpPr>
-      <p:grpSpPr/>
+      <p:grpSpPr>
+        <a:xfrm>
+          <a:off x="0" y="0"/>
+          <a:ext cx="0" cy="0"/>
+          <a:chOff x="0" y="0"/>
+          <a:chExt cx="0" cy="0"/>
+        </a:xfrm>
+      </p:grpSpPr>
       <p:sp>
         <p:nvSpPr>
           <p:cNvPr id="2" name="Text 0"/>
@@ -6110,7 +6117,7 @@
           <a:noFill/>
         </p:spPr>
         <p:txBody>
-          <a:bodyPr wrap="square" lIns="0" rIns="0" tIns="0" bIns="0">
+          <a:bodyPr wrap="square" lIns="0" tIns="0" rIns="0" bIns="0">
             <a:spAutoFit/>
           </a:bodyPr>
           <a:lstStyle/>
@@ -6123,7 +6130,7 @@
                 </a:solidFill>
                 <a:latin typeface="Meiryo"/>
               </a:rPr>
-              <a:t>トヨタ自動車株式会社（IFRS・連結）　｜　サンプル：配布/サンプル/トヨタ自動車_財務ダッシュボード.html</a:t>
+              <a:t>AREホールディングス株式会社（IFRS・連結）　｜　サンプル：配布/サンプル/AREホールディングス_財務ダッシュボード.html</a:t>
             </a:r>
           </a:p>
         </p:txBody>
@@ -6137,7 +6144,7 @@
           <p:nvPr/>
         </p:nvPicPr>
         <p:blipFill>
-          <a:blip r:embed="rId3"/>
+          <a:blip r:embed="rId2"/>
           <a:stretch>
             <a:fillRect/>
           </a:stretch>
@@ -9138,7 +9145,7 @@
 </file>
 
 <file path=ppt/slides/slide21.xml><?xml version="1.0" encoding="utf-8"?>
-<p:sld xmlns:a="http://schemas.openxmlformats.org/drawingml/2006/main" xmlns:p="http://schemas.openxmlformats.org/presentationml/2006/main" xmlns:r="http://schemas.openxmlformats.org/officeDocument/2006/relationships">
+<p:sld xmlns:a="http://schemas.openxmlformats.org/drawingml/2006/main" xmlns:r="http://schemas.openxmlformats.org/officeDocument/2006/relationships" xmlns:p="http://schemas.openxmlformats.org/presentationml/2006/main">
   <p:cSld>
     <p:bg>
       <p:bgPr>
@@ -9154,7 +9161,14 @@
         <p:cNvGrpSpPr/>
         <p:nvPr/>
       </p:nvGrpSpPr>
-      <p:grpSpPr/>
+      <p:grpSpPr>
+        <a:xfrm>
+          <a:off x="0" y="0"/>
+          <a:ext cx="0" cy="0"/>
+          <a:chOff x="0" y="0"/>
+          <a:chExt cx="0" cy="0"/>
+        </a:xfrm>
+      </p:grpSpPr>
       <p:sp>
         <p:nvSpPr>
           <p:cNvPr id="2" name="Text 0"/>
@@ -9357,7 +9371,7 @@
           <a:noFill/>
         </p:spPr>
         <p:txBody>
-          <a:bodyPr wrap="square" lIns="0" rIns="0" tIns="0" bIns="0">
+          <a:bodyPr wrap="square" lIns="0" tIns="0" rIns="0" bIns="0">
             <a:spAutoFit/>
           </a:bodyPr>
           <a:lstStyle/>
@@ -9370,7 +9384,7 @@
                 </a:solidFill>
                 <a:latin typeface="Meiryo"/>
               </a:rPr>
-              <a:t>キーエンス（日本基準）　｜　1社目トヨタ（IFRS）と同じスキルで生成。科目の違い（純資産・経常利益 など）はスキルが自動対応。</a:t>
+              <a:t>キーエンス（日本基準）　｜　1社目ARE（IFRS）と同じスキルで生成。科目の違い（純資産・経常利益 など）はスキルが自動対応。</a:t>
             </a:r>
           </a:p>
         </p:txBody>
@@ -14694,7 +14708,7 @@
           <p:nvPr/>
         </p:nvPicPr>
         <p:blipFill>
-          <a:blip r:embed="rId5"/>
+          <a:blip r:embed="rId3"/>
           <a:stretch>
             <a:fillRect/>
           </a:stretch>
@@ -14723,7 +14737,7 @@
           <p:nvPr/>
         </p:nvPicPr>
         <p:blipFill>
-          <a:blip r:embed="rId6"/>
+          <a:blip r:embed="rId4"/>
           <a:stretch>
             <a:fillRect/>
           </a:stretch>
@@ -14854,7 +14868,7 @@
         </p:nvSpPr>
         <p:spPr>
           <a:xfrm>
-            <a:off x="548640" y="2377440"/>
+            <a:off x="548640" y="1391920"/>
             <a:ext cx="11094415" cy="365760"/>
           </a:xfrm>
           <a:prstGeom prst="rect">
@@ -14893,7 +14907,7 @@
         </p:nvSpPr>
         <p:spPr>
           <a:xfrm>
-            <a:off x="548640" y="2788920"/>
+            <a:off x="548640" y="1803400"/>
             <a:ext cx="7315200" cy="914400"/>
           </a:xfrm>
           <a:prstGeom prst="rect">
@@ -14910,6 +14924,17 @@
               <a:buNone/>
             </a:pPr>
             <a:r>
+              <a:rPr lang="en-US" sz="4600" b="1" dirty="0" err="1">
+                <a:solidFill>
+                  <a:srgbClr val="232830"/>
+                </a:solidFill>
+                <a:latin typeface="Meiryo" pitchFamily="34" charset="0"/>
+                <a:ea typeface="Meiryo" pitchFamily="34" charset="-122"/>
+                <a:cs typeface="Meiryo" pitchFamily="34" charset="-120"/>
+              </a:rPr>
+              <a:t>担当者</a:t>
+            </a:r>
+            <a:r>
               <a:rPr lang="en-US" sz="4600" b="1" dirty="0">
                 <a:solidFill>
                   <a:srgbClr val="232830"/>
@@ -14918,7 +14943,7 @@
                 <a:ea typeface="Meiryo" pitchFamily="34" charset="-122"/>
                 <a:cs typeface="Meiryo" pitchFamily="34" charset="-120"/>
               </a:rPr>
-              <a:t>講師 自己紹介</a:t>
+              <a:t> 自己紹介</a:t>
             </a:r>
             <a:endParaRPr lang="en-US" sz="4600" dirty="0"/>
           </a:p>
@@ -14932,22 +14957,48 @@
         </p:nvSpPr>
         <p:spPr>
           <a:xfrm>
-            <a:off x="548640" y="3794760"/>
-            <a:ext cx="7315200" cy="457200"/>
-          </a:xfrm>
-          <a:prstGeom prst="rect">
-            <a:avLst/>
-          </a:prstGeom>
-          <a:noFill/>
-          <a:ln/>
-        </p:spPr>
-        <p:txBody>
-          <a:bodyPr wrap="square" rtlCol="0" anchor="ctr"/>
-          <a:lstStyle/>
-          <a:p>
-            <a:pPr marL="0" indent="0">
-              <a:buNone/>
-            </a:pPr>
+            <a:off x="548640" y="2809240"/>
+            <a:ext cx="7863840" cy="2651760"/>
+          </a:xfrm>
+          <a:prstGeom prst="rect">
+            <a:avLst/>
+          </a:prstGeom>
+          <a:noFill/>
+          <a:ln/>
+        </p:spPr>
+        <p:txBody>
+          <a:bodyPr wrap="square" rtlCol="0" anchor="t"/>
+          <a:lstStyle/>
+          <a:p>
+            <a:pPr marL="285750" indent="-285750">
+              <a:lnSpc>
+                <a:spcPct val="150000"/>
+              </a:lnSpc>
+              <a:buFont typeface="Arial" panose="020B0604020202020204" pitchFamily="34" charset="0"/>
+              <a:buChar char="•"/>
+            </a:pPr>
+            <a:r>
+              <a:rPr lang="en-US" sz="1800" b="1" dirty="0" err="1">
+                <a:solidFill>
+                  <a:srgbClr val="6F7683"/>
+                </a:solidFill>
+                <a:latin typeface="Meiryo" pitchFamily="34" charset="0"/>
+                <a:ea typeface="Meiryo" pitchFamily="34" charset="-122"/>
+                <a:cs typeface="Meiryo" pitchFamily="34" charset="-120"/>
+              </a:rPr>
+              <a:t>名前</a:t>
+            </a:r>
+            <a:r>
+              <a:rPr lang="en-US" sz="1800" b="1" dirty="0">
+                <a:solidFill>
+                  <a:srgbClr val="6F7683"/>
+                </a:solidFill>
+                <a:latin typeface="Meiryo" pitchFamily="34" charset="0"/>
+                <a:ea typeface="Meiryo" pitchFamily="34" charset="-122"/>
+                <a:cs typeface="Meiryo" pitchFamily="34" charset="-120"/>
+              </a:rPr>
+              <a:t>:</a:t>
+            </a:r>
             <a:r>
               <a:rPr lang="en-US" sz="1800" dirty="0">
                 <a:solidFill>
@@ -14957,9 +15008,242 @@
                 <a:ea typeface="Meiryo" pitchFamily="34" charset="-122"/>
                 <a:cs typeface="Meiryo" pitchFamily="34" charset="-120"/>
               </a:rPr>
-              <a:t>お名前 ／ 所属・役割 ／ Claude・生成AIでやってきたこと</a:t>
-            </a:r>
-            <a:endParaRPr lang="en-US" sz="1800" dirty="0"/>
+              <a:t> </a:t>
+            </a:r>
+            <a:r>
+              <a:rPr lang="en-US" sz="1800" dirty="0" err="1">
+                <a:solidFill>
+                  <a:srgbClr val="6F7683"/>
+                </a:solidFill>
+                <a:latin typeface="Meiryo" pitchFamily="34" charset="0"/>
+                <a:ea typeface="Meiryo" pitchFamily="34" charset="-122"/>
+                <a:cs typeface="Meiryo" pitchFamily="34" charset="-120"/>
+              </a:rPr>
+              <a:t>板倉</a:t>
+            </a:r>
+            <a:r>
+              <a:rPr lang="en-US" sz="1800" dirty="0">
+                <a:solidFill>
+                  <a:srgbClr val="6F7683"/>
+                </a:solidFill>
+                <a:latin typeface="Meiryo" pitchFamily="34" charset="0"/>
+                <a:ea typeface="Meiryo" pitchFamily="34" charset="-122"/>
+                <a:cs typeface="Meiryo" pitchFamily="34" charset="-120"/>
+              </a:rPr>
+              <a:t> </a:t>
+            </a:r>
+            <a:r>
+              <a:rPr lang="en-US" sz="1800" dirty="0" err="1">
+                <a:solidFill>
+                  <a:srgbClr val="6F7683"/>
+                </a:solidFill>
+                <a:latin typeface="Meiryo" pitchFamily="34" charset="0"/>
+                <a:ea typeface="Meiryo" pitchFamily="34" charset="-122"/>
+                <a:cs typeface="Meiryo" pitchFamily="34" charset="-120"/>
+              </a:rPr>
+              <a:t>翔太</a:t>
+            </a:r>
+            <a:endParaRPr lang="en-US" dirty="0">
+              <a:solidFill>
+                <a:srgbClr val="6F7683"/>
+              </a:solidFill>
+              <a:latin typeface="Meiryo" pitchFamily="34" charset="0"/>
+              <a:ea typeface="Meiryo" pitchFamily="34" charset="-122"/>
+              <a:cs typeface="Meiryo" pitchFamily="34" charset="-120"/>
+            </a:endParaRPr>
+          </a:p>
+          <a:p>
+            <a:pPr marL="285750" indent="-285750">
+              <a:lnSpc>
+                <a:spcPct val="150000"/>
+              </a:lnSpc>
+              <a:buFont typeface="Arial" panose="020B0604020202020204" pitchFamily="34" charset="0"/>
+              <a:buChar char="•"/>
+            </a:pPr>
+            <a:r>
+              <a:rPr lang="en-US" sz="1800" b="1" dirty="0" err="1">
+                <a:solidFill>
+                  <a:srgbClr val="6F7683"/>
+                </a:solidFill>
+                <a:latin typeface="Meiryo" pitchFamily="34" charset="0"/>
+                <a:ea typeface="Meiryo" pitchFamily="34" charset="-122"/>
+                <a:cs typeface="Meiryo" pitchFamily="34" charset="-120"/>
+              </a:rPr>
+              <a:t>所属・役割</a:t>
+            </a:r>
+            <a:r>
+              <a:rPr lang="en-US" sz="1800" b="1" dirty="0">
+                <a:solidFill>
+                  <a:srgbClr val="6F7683"/>
+                </a:solidFill>
+                <a:latin typeface="Meiryo" pitchFamily="34" charset="0"/>
+                <a:ea typeface="Meiryo" pitchFamily="34" charset="-122"/>
+                <a:cs typeface="Meiryo" pitchFamily="34" charset="-120"/>
+              </a:rPr>
+              <a:t>:</a:t>
+            </a:r>
+            <a:r>
+              <a:rPr lang="en-US" sz="1800" dirty="0">
+                <a:solidFill>
+                  <a:srgbClr val="6F7683"/>
+                </a:solidFill>
+                <a:latin typeface="Meiryo" pitchFamily="34" charset="0"/>
+                <a:ea typeface="Meiryo" pitchFamily="34" charset="-122"/>
+                <a:cs typeface="Meiryo" pitchFamily="34" charset="-120"/>
+              </a:rPr>
+              <a:t> </a:t>
+            </a:r>
+            <a:r>
+              <a:rPr lang="en-US" sz="1800" dirty="0" err="1">
+                <a:solidFill>
+                  <a:srgbClr val="6F7683"/>
+                </a:solidFill>
+                <a:latin typeface="Meiryo" pitchFamily="34" charset="0"/>
+                <a:ea typeface="Meiryo" pitchFamily="34" charset="-122"/>
+                <a:cs typeface="Meiryo" pitchFamily="34" charset="-120"/>
+              </a:rPr>
+              <a:t>伊藤忠テクノソリューションズ・UXエンジニア</a:t>
+            </a:r>
+            <a:endParaRPr lang="en-US" dirty="0">
+              <a:solidFill>
+                <a:srgbClr val="6F7683"/>
+              </a:solidFill>
+              <a:latin typeface="Meiryo" pitchFamily="34" charset="0"/>
+              <a:ea typeface="Meiryo" pitchFamily="34" charset="-122"/>
+              <a:cs typeface="Meiryo" pitchFamily="34" charset="-120"/>
+            </a:endParaRPr>
+          </a:p>
+          <a:p>
+            <a:pPr marL="285750" indent="-285750">
+              <a:lnSpc>
+                <a:spcPct val="150000"/>
+              </a:lnSpc>
+              <a:buFont typeface="Arial" panose="020B0604020202020204" pitchFamily="34" charset="0"/>
+              <a:buChar char="•"/>
+            </a:pPr>
+            <a:r>
+              <a:rPr lang="en-US" sz="1800" b="1" dirty="0" err="1">
+                <a:solidFill>
+                  <a:srgbClr val="6F7683"/>
+                </a:solidFill>
+                <a:latin typeface="Meiryo" pitchFamily="34" charset="0"/>
+                <a:ea typeface="Meiryo" pitchFamily="34" charset="-122"/>
+                <a:cs typeface="Meiryo" pitchFamily="34" charset="-120"/>
+              </a:rPr>
+              <a:t>Claude・生成AIでやってきたこと</a:t>
+            </a:r>
+            <a:r>
+              <a:rPr lang="en-US" sz="1800" b="1" dirty="0">
+                <a:solidFill>
+                  <a:srgbClr val="6F7683"/>
+                </a:solidFill>
+                <a:latin typeface="Meiryo" pitchFamily="34" charset="0"/>
+                <a:ea typeface="Meiryo" pitchFamily="34" charset="-122"/>
+                <a:cs typeface="Meiryo" pitchFamily="34" charset="-120"/>
+              </a:rPr>
+              <a:t>: </a:t>
+            </a:r>
+          </a:p>
+          <a:p>
+            <a:pPr marL="742950" lvl="1" indent="-285750">
+              <a:lnSpc>
+                <a:spcPct val="150000"/>
+              </a:lnSpc>
+              <a:buFont typeface="Arial" panose="020B0604020202020204" pitchFamily="34" charset="0"/>
+              <a:buChar char="•"/>
+            </a:pPr>
+            <a:r>
+              <a:rPr lang="en-US" dirty="0" err="1">
+                <a:solidFill>
+                  <a:srgbClr val="6F7683"/>
+                </a:solidFill>
+                <a:latin typeface="Meiryo" pitchFamily="34" charset="0"/>
+                <a:ea typeface="Meiryo" pitchFamily="34" charset="-122"/>
+              </a:rPr>
+              <a:t>古いシステムのリプレイス（コード</a:t>
+            </a:r>
+            <a:r>
+              <a:rPr lang="en-US" dirty="0">
+                <a:solidFill>
+                  <a:srgbClr val="6F7683"/>
+                </a:solidFill>
+                <a:latin typeface="Meiryo" pitchFamily="34" charset="0"/>
+                <a:ea typeface="Meiryo" pitchFamily="34" charset="-122"/>
+              </a:rPr>
+              <a:t>←→</a:t>
+            </a:r>
+            <a:r>
+              <a:rPr lang="en-US" dirty="0" err="1">
+                <a:solidFill>
+                  <a:srgbClr val="6F7683"/>
+                </a:solidFill>
+                <a:latin typeface="Meiryo" pitchFamily="34" charset="0"/>
+                <a:ea typeface="Meiryo" pitchFamily="34" charset="-122"/>
+              </a:rPr>
+              <a:t>資料</a:t>
+            </a:r>
+            <a:r>
+              <a:rPr lang="en-US" dirty="0">
+                <a:solidFill>
+                  <a:srgbClr val="6F7683"/>
+                </a:solidFill>
+                <a:latin typeface="Meiryo" pitchFamily="34" charset="0"/>
+                <a:ea typeface="Meiryo" pitchFamily="34" charset="-122"/>
+              </a:rPr>
+              <a:t>）</a:t>
+            </a:r>
+          </a:p>
+          <a:p>
+            <a:pPr marL="742950" lvl="1" indent="-285750">
+              <a:lnSpc>
+                <a:spcPct val="150000"/>
+              </a:lnSpc>
+              <a:buFont typeface="Arial" panose="020B0604020202020204" pitchFamily="34" charset="0"/>
+              <a:buChar char="•"/>
+            </a:pPr>
+            <a:r>
+              <a:rPr lang="en-US" dirty="0" err="1">
+                <a:solidFill>
+                  <a:srgbClr val="6F7683"/>
+                </a:solidFill>
+                <a:latin typeface="Meiryo" pitchFamily="34" charset="0"/>
+                <a:ea typeface="Meiryo" pitchFamily="34" charset="-122"/>
+              </a:rPr>
+              <a:t>製品ブランディングのための競合調査＆資料作成</a:t>
+            </a:r>
+            <a:endParaRPr lang="en-US" dirty="0">
+              <a:solidFill>
+                <a:srgbClr val="6F7683"/>
+              </a:solidFill>
+              <a:latin typeface="Meiryo" pitchFamily="34" charset="0"/>
+              <a:ea typeface="Meiryo" pitchFamily="34" charset="-122"/>
+            </a:endParaRPr>
+          </a:p>
+          <a:p>
+            <a:pPr marL="742950" lvl="1" indent="-285750">
+              <a:lnSpc>
+                <a:spcPct val="150000"/>
+              </a:lnSpc>
+              <a:buFont typeface="Arial" panose="020B0604020202020204" pitchFamily="34" charset="0"/>
+              <a:buChar char="•"/>
+            </a:pPr>
+            <a:r>
+              <a:rPr lang="en-US" dirty="0" err="1">
+                <a:solidFill>
+                  <a:srgbClr val="6F7683"/>
+                </a:solidFill>
+                <a:latin typeface="Meiryo" pitchFamily="34" charset="0"/>
+                <a:ea typeface="Meiryo" pitchFamily="34" charset="-122"/>
+              </a:rPr>
+              <a:t>Webアプリケーションのプロトタイプ開発</a:t>
+            </a:r>
+            <a:endParaRPr lang="en-US" dirty="0">
+              <a:solidFill>
+                <a:srgbClr val="6F7683"/>
+              </a:solidFill>
+              <a:latin typeface="Meiryo" pitchFamily="34" charset="0"/>
+              <a:ea typeface="Meiryo" pitchFamily="34" charset="-122"/>
+            </a:endParaRPr>
           </a:p>
         </p:txBody>
       </p:sp>
@@ -15079,6 +15363,36 @@
           </a:p>
         </p:txBody>
       </p:sp>
+      <p:pic>
+        <p:nvPicPr>
+          <p:cNvPr id="9" name="図 8">
+            <a:extLst>
+              <a:ext uri="{FF2B5EF4-FFF2-40B4-BE49-F238E27FC236}">
+                <a16:creationId xmlns:a16="http://schemas.microsoft.com/office/drawing/2014/main" id="{9A319817-7AD8-B741-17A0-089FBCE02031}"/>
+              </a:ext>
+            </a:extLst>
+          </p:cNvPr>
+          <p:cNvPicPr>
+            <a:picLocks noChangeAspect="1"/>
+          </p:cNvPicPr>
+          <p:nvPr/>
+        </p:nvPicPr>
+        <p:blipFill>
+          <a:blip r:embed="rId3"/>
+          <a:stretch>
+            <a:fillRect/>
+          </a:stretch>
+        </p:blipFill>
+        <p:spPr>
+          <a:xfrm>
+            <a:off x="9056370" y="2381250"/>
+            <a:ext cx="2095500" cy="2095500"/>
+          </a:xfrm>
+          <a:prstGeom prst="rect">
+            <a:avLst/>
+          </a:prstGeom>
+        </p:spPr>
+      </p:pic>
     </p:spTree>
   </p:cSld>
   <p:clrMapOvr>
@@ -16953,7 +17267,7 @@
           <p:nvPr/>
         </p:nvPicPr>
         <p:blipFill>
-          <a:blip r:embed="rId5"/>
+          <a:blip r:embed="rId3"/>
           <a:stretch>
             <a:fillRect/>
           </a:stretch>
@@ -17613,7 +17927,7 @@
 </file>
 
 <file path=ppt/slides/slide8.xml><?xml version="1.0" encoding="utf-8"?>
-<p:sld xmlns:a="http://schemas.openxmlformats.org/drawingml/2006/main" xmlns:p="http://schemas.openxmlformats.org/presentationml/2006/main" xmlns:r="http://schemas.openxmlformats.org/officeDocument/2006/relationships">
+<p:sld xmlns:a="http://schemas.openxmlformats.org/drawingml/2006/main" xmlns:r="http://schemas.openxmlformats.org/officeDocument/2006/relationships" xmlns:p="http://schemas.openxmlformats.org/presentationml/2006/main">
   <p:cSld>
     <p:bg>
       <p:bgPr>
@@ -17629,7 +17943,14 @@
         <p:cNvGrpSpPr/>
         <p:nvPr/>
       </p:nvGrpSpPr>
-      <p:grpSpPr/>
+      <p:grpSpPr>
+        <a:xfrm>
+          <a:off x="0" y="0"/>
+          <a:ext cx="0" cy="0"/>
+          <a:chOff x="0" y="0"/>
+          <a:chExt cx="0" cy="0"/>
+        </a:xfrm>
+      </p:grpSpPr>
       <p:sp>
         <p:nvSpPr>
           <p:cNvPr id="2" name="Text 0"/>
@@ -17832,7 +18153,7 @@
           <a:noFill/>
         </p:spPr>
         <p:txBody>
-          <a:bodyPr wrap="square" lIns="0" rIns="0" tIns="0" bIns="0">
+          <a:bodyPr wrap="square" lIns="0" tIns="0" rIns="0" bIns="0">
             <a:spAutoFit/>
           </a:bodyPr>
           <a:lstStyle/>
